--- a/m4a/docs/sql_функции.pptx
+++ b/m4a/docs/sql_функции.pptx
@@ -269,7 +269,7 @@
           <a:p>
             <a:fld id="{EF790F8C-5FB9-4EFE-BCC7-F735A3026FD8}" type="datetimeFigureOut">
               <a:rPr lang="ru-RU" smtClean="0"/>
-              <a:t>07.09.2025</a:t>
+              <a:t>09.09.2025</a:t>
             </a:fld>
             <a:endParaRPr lang="ru-RU"/>
           </a:p>
@@ -467,7 +467,7 @@
           <a:p>
             <a:fld id="{EF790F8C-5FB9-4EFE-BCC7-F735A3026FD8}" type="datetimeFigureOut">
               <a:rPr lang="ru-RU" smtClean="0"/>
-              <a:t>07.09.2025</a:t>
+              <a:t>09.09.2025</a:t>
             </a:fld>
             <a:endParaRPr lang="ru-RU"/>
           </a:p>
@@ -675,7 +675,7 @@
           <a:p>
             <a:fld id="{EF790F8C-5FB9-4EFE-BCC7-F735A3026FD8}" type="datetimeFigureOut">
               <a:rPr lang="ru-RU" smtClean="0"/>
-              <a:t>07.09.2025</a:t>
+              <a:t>09.09.2025</a:t>
             </a:fld>
             <a:endParaRPr lang="ru-RU"/>
           </a:p>
@@ -1687,7 +1687,7 @@
           <a:p>
             <a:fld id="{EF790F8C-5FB9-4EFE-BCC7-F735A3026FD8}" type="datetimeFigureOut">
               <a:rPr lang="ru-RU" smtClean="0"/>
-              <a:t>07.09.2025</a:t>
+              <a:t>09.09.2025</a:t>
             </a:fld>
             <a:endParaRPr lang="ru-RU"/>
           </a:p>
@@ -2798,7 +2798,7 @@
           <a:p>
             <a:fld id="{EF790F8C-5FB9-4EFE-BCC7-F735A3026FD8}" type="datetimeFigureOut">
               <a:rPr lang="ru-RU" smtClean="0"/>
-              <a:t>07.09.2025</a:t>
+              <a:t>09.09.2025</a:t>
             </a:fld>
             <a:endParaRPr lang="ru-RU"/>
           </a:p>
@@ -3073,7 +3073,7 @@
           <a:p>
             <a:fld id="{EF790F8C-5FB9-4EFE-BCC7-F735A3026FD8}" type="datetimeFigureOut">
               <a:rPr lang="ru-RU" smtClean="0"/>
-              <a:t>07.09.2025</a:t>
+              <a:t>09.09.2025</a:t>
             </a:fld>
             <a:endParaRPr lang="ru-RU"/>
           </a:p>
@@ -3338,7 +3338,7 @@
           <a:p>
             <a:fld id="{EF790F8C-5FB9-4EFE-BCC7-F735A3026FD8}" type="datetimeFigureOut">
               <a:rPr lang="ru-RU" smtClean="0"/>
-              <a:t>07.09.2025</a:t>
+              <a:t>09.09.2025</a:t>
             </a:fld>
             <a:endParaRPr lang="ru-RU"/>
           </a:p>
@@ -3750,7 +3750,7 @@
           <a:p>
             <a:fld id="{EF790F8C-5FB9-4EFE-BCC7-F735A3026FD8}" type="datetimeFigureOut">
               <a:rPr lang="ru-RU" smtClean="0"/>
-              <a:t>07.09.2025</a:t>
+              <a:t>09.09.2025</a:t>
             </a:fld>
             <a:endParaRPr lang="ru-RU"/>
           </a:p>
@@ -3891,7 +3891,7 @@
           <a:p>
             <a:fld id="{EF790F8C-5FB9-4EFE-BCC7-F735A3026FD8}" type="datetimeFigureOut">
               <a:rPr lang="ru-RU" smtClean="0"/>
-              <a:t>07.09.2025</a:t>
+              <a:t>09.09.2025</a:t>
             </a:fld>
             <a:endParaRPr lang="ru-RU"/>
           </a:p>
@@ -4004,7 +4004,7 @@
           <a:p>
             <a:fld id="{EF790F8C-5FB9-4EFE-BCC7-F735A3026FD8}" type="datetimeFigureOut">
               <a:rPr lang="ru-RU" smtClean="0"/>
-              <a:t>07.09.2025</a:t>
+              <a:t>09.09.2025</a:t>
             </a:fld>
             <a:endParaRPr lang="ru-RU"/>
           </a:p>
@@ -4315,7 +4315,7 @@
           <a:p>
             <a:fld id="{EF790F8C-5FB9-4EFE-BCC7-F735A3026FD8}" type="datetimeFigureOut">
               <a:rPr lang="ru-RU" smtClean="0"/>
-              <a:t>07.09.2025</a:t>
+              <a:t>09.09.2025</a:t>
             </a:fld>
             <a:endParaRPr lang="ru-RU"/>
           </a:p>
@@ -4603,7 +4603,7 @@
           <a:p>
             <a:fld id="{EF790F8C-5FB9-4EFE-BCC7-F735A3026FD8}" type="datetimeFigureOut">
               <a:rPr lang="ru-RU" smtClean="0"/>
-              <a:t>07.09.2025</a:t>
+              <a:t>09.09.2025</a:t>
             </a:fld>
             <a:endParaRPr lang="ru-RU"/>
           </a:p>
@@ -4844,7 +4844,7 @@
           <a:p>
             <a:fld id="{EF790F8C-5FB9-4EFE-BCC7-F735A3026FD8}" type="datetimeFigureOut">
               <a:rPr lang="ru-RU" smtClean="0"/>
-              <a:t>07.09.2025</a:t>
+              <a:t>09.09.2025</a:t>
             </a:fld>
             <a:endParaRPr lang="ru-RU"/>
           </a:p>
@@ -6196,8 +6196,8 @@
         </p:nvSpPr>
         <p:spPr>
           <a:xfrm>
-            <a:off x="1078652" y="3175147"/>
-            <a:ext cx="10515360" cy="1325280"/>
+            <a:off x="228841" y="3259421"/>
+            <a:ext cx="11365171" cy="1325280"/>
           </a:xfrm>
         </p:spPr>
         <p:txBody>
@@ -6220,7 +6220,61 @@
                 <a:latin typeface="Segoe UI Light" panose="020B0502040204020203" pitchFamily="34" charset="0"/>
                 <a:cs typeface="Segoe UI Light" panose="020B0502040204020203" pitchFamily="34" charset="0"/>
               </a:rPr>
-              <a:t>Агрегатные и оконные функции</a:t>
+              <a:t>Функции, процедуры, составные типы данных.</a:t>
+            </a:r>
+          </a:p>
+          <a:p>
+            <a:pPr algn="ctr"/>
+            <a:r>
+              <a:rPr lang="ru-RU" sz="4267" b="1" dirty="0">
+                <a:solidFill>
+                  <a:srgbClr val="0000FF"/>
+                </a:solidFill>
+                <a:effectLst>
+                  <a:outerShdw blurRad="38100" dist="38100" dir="2700000" algn="tl">
+                    <a:srgbClr val="000000">
+                      <a:alpha val="43137"/>
+                    </a:srgbClr>
+                  </a:outerShdw>
+                </a:effectLst>
+                <a:latin typeface="Segoe UI Light" panose="020B0502040204020203" pitchFamily="34" charset="0"/>
+                <a:cs typeface="Segoe UI Light" panose="020B0502040204020203" pitchFamily="34" charset="0"/>
+              </a:rPr>
+              <a:t>Массивы, </a:t>
+            </a:r>
+            <a:r>
+              <a:rPr lang="en-US" sz="4267" b="1" dirty="0">
+                <a:solidFill>
+                  <a:srgbClr val="0000FF"/>
+                </a:solidFill>
+                <a:effectLst>
+                  <a:outerShdw blurRad="38100" dist="38100" dir="2700000" algn="tl">
+                    <a:srgbClr val="000000">
+                      <a:alpha val="43137"/>
+                    </a:srgbClr>
+                  </a:outerShdw>
+                </a:effectLst>
+                <a:latin typeface="Segoe UI Light" panose="020B0502040204020203" pitchFamily="34" charset="0"/>
+                <a:cs typeface="Segoe UI Light" panose="020B0502040204020203" pitchFamily="34" charset="0"/>
+              </a:rPr>
+              <a:t>json. </a:t>
+            </a:r>
+            <a:r>
+              <a:rPr lang="ru-RU" sz="4267" b="1" dirty="0">
+                <a:solidFill>
+                  <a:srgbClr val="0000FF"/>
+                </a:solidFill>
+                <a:effectLst>
+                  <a:outerShdw blurRad="38100" dist="38100" dir="2700000" algn="tl">
+                    <a:srgbClr val="000000">
+                      <a:alpha val="43137"/>
+                    </a:srgbClr>
+                  </a:outerShdw>
+                </a:effectLst>
+                <a:latin typeface="Segoe UI Light" panose="020B0502040204020203" pitchFamily="34" charset="0"/>
+                <a:cs typeface="Segoe UI Light" panose="020B0502040204020203" pitchFamily="34" charset="0"/>
+              </a:rPr>
+              <a:t>Секционирование </a:t>
             </a:r>
             <a:endParaRPr lang="en-US" sz="4267" b="1" dirty="0">
               <a:solidFill>
